--- a/商业计划书/智径-AdaptivePath-路演PPT.pptx
+++ b/商业计划书/智径-AdaptivePath-路演PPT.pptx
@@ -3705,7 +3705,7 @@
                 </a:solidFill>
                 <a:latin typeface="Microsoft YaHei"/>
               </a:rPr>
-              <a:t>[待填]</a:t>
+              <a:t>崇理团队</a:t>
             </a:r>
           </a:p>
         </p:txBody>
@@ -12799,48 +12799,13 @@
           <a:p>
             <a:pPr algn="ctr"/>
             <a:r>
-              <a:rPr sz="1400" b="0">
+              <a:rPr sz="1200" b="0">
                 <a:solidFill>
                   <a:srgbClr val="6B7280"/>
                 </a:solidFill>
                 <a:latin typeface="Microsoft YaHei"/>
               </a:rPr>
-              <a:t>GitHub: github.com/[team]/adaptive-path    ·    团队: 智径团队    ·    学校: [待填]</a:t>
-            </a:r>
-          </a:p>
-        </p:txBody>
-      </p:sp>
-      <p:sp>
-        <p:nvSpPr>
-          <p:cNvPr id="19" name="TextBox 18"/>
-          <p:cNvSpPr txBox="1"/>
-          <p:nvPr/>
-        </p:nvSpPr>
-        <p:spPr>
-          <a:xfrm>
-            <a:off x="457200" y="6126480"/>
-            <a:ext cx="11247120" cy="365760"/>
-          </a:xfrm>
-          <a:prstGeom prst="rect">
-            <a:avLst/>
-          </a:prstGeom>
-          <a:noFill/>
-        </p:spPr>
-        <p:txBody>
-          <a:bodyPr wrap="square" lIns="45720" rIns="45720" tIns="18288" bIns="18288">
-            <a:spAutoFit/>
-          </a:bodyPr>
-          <a:lstStyle/>
-          <a:p>
-            <a:pPr algn="ctr"/>
-            <a:r>
-              <a:rPr sz="1200" b="0">
-                <a:solidFill>
-                  <a:srgbClr val="6B7280"/>
-                </a:solidFill>
-                <a:latin typeface="Microsoft YaHei"/>
-              </a:rPr>
-              <a:t>邮箱: [email]    ·    QQ: [qq]</a:t>
+              <a:t>GitHub: github.com/logicore-code/zhijing-adaptive-path    ·    GitCode: gitcode.com/jiangzeyu-2026/zhijing-adaptive-path    ·    团队: 崇理团队</a:t>
             </a:r>
           </a:p>
         </p:txBody>

--- a/商业计划书/智径-AdaptivePath-路演PPT.pptx
+++ b/商业计划书/智径-AdaptivePath-路演PPT.pptx
@@ -10495,23 +10495,23 @@
         </p:nvSpPr>
         <p:spPr>
           <a:xfrm>
-            <a:off x="365760" y="2011680"/>
-            <a:ext cx="2194560" cy="731520"/>
-          </a:xfrm>
-          <a:prstGeom prst="rect">
-            <a:avLst/>
-          </a:prstGeom>
-          <a:noFill/>
-        </p:spPr>
-        <p:txBody>
-          <a:bodyPr wrap="square" lIns="45720" rIns="45720" tIns="18288" bIns="18288">
-            <a:spAutoFit/>
-          </a:bodyPr>
-          <a:lstStyle/>
-          <a:p>
-            <a:pPr algn="ctr"/>
-            <a:r>
-              <a:rPr sz="4200" b="0">
+            <a:off x="365760" y="1920240"/>
+            <a:ext cx="2194560" cy="548640"/>
+          </a:xfrm>
+          <a:prstGeom prst="rect">
+            <a:avLst/>
+          </a:prstGeom>
+          <a:noFill/>
+        </p:spPr>
+        <p:txBody>
+          <a:bodyPr wrap="square" lIns="45720" rIns="45720" tIns="18288" bIns="18288">
+            <a:spAutoFit/>
+          </a:bodyPr>
+          <a:lstStyle/>
+          <a:p>
+            <a:pPr algn="ctr"/>
+            <a:r>
+              <a:rPr sz="3600" b="0">
                 <a:solidFill>
                   <a:srgbClr val="0075FF"/>
                 </a:solidFill>
@@ -10530,7 +10530,7 @@
         </p:nvSpPr>
         <p:spPr>
           <a:xfrm>
-            <a:off x="365760" y="2743200"/>
+            <a:off x="365760" y="2514600"/>
             <a:ext cx="2194560" cy="365760"/>
           </a:xfrm>
           <a:prstGeom prst="rect">
@@ -10546,13 +10546,13 @@
           <a:p>
             <a:pPr algn="ctr"/>
             <a:r>
-              <a:rPr sz="1400" b="1">
+              <a:rPr sz="1800" b="1">
                 <a:solidFill>
                   <a:srgbClr val="0075FF"/>
                 </a:solidFill>
                 <a:latin typeface="Microsoft YaHei"/>
               </a:rPr>
-              <a:t>主负责人</a:t>
+              <a:t>蒋泽宇</a:t>
             </a:r>
           </a:p>
         </p:txBody>
@@ -10565,7 +10565,7 @@
         </p:nvSpPr>
         <p:spPr>
           <a:xfrm>
-            <a:off x="731520" y="3200400"/>
+            <a:off x="731520" y="2926080"/>
             <a:ext cx="1463040" cy="18288"/>
           </a:xfrm>
           <a:prstGeom prst="rect">
@@ -10608,8 +10608,8 @@
         </p:nvSpPr>
         <p:spPr>
           <a:xfrm>
-            <a:off x="457200" y="3291840"/>
-            <a:ext cx="2011680" cy="365760"/>
+            <a:off x="457200" y="3017520"/>
+            <a:ext cx="2011680" cy="457200"/>
           </a:xfrm>
           <a:prstGeom prst="rect">
             <a:avLst/>
@@ -10630,7 +10630,7 @@
                 </a:solidFill>
                 <a:latin typeface="Microsoft YaHei"/>
               </a:rPr>
-              <a:t>整体战略与商务</a:t>
+              <a:t>主负责人 / 整体架构</a:t>
             </a:r>
           </a:p>
         </p:txBody>
@@ -10643,8 +10643,8 @@
         </p:nvSpPr>
         <p:spPr>
           <a:xfrm>
-            <a:off x="457200" y="3657600"/>
-            <a:ext cx="2011680" cy="365760"/>
+            <a:off x="457200" y="3520440"/>
+            <a:ext cx="2011680" cy="457200"/>
           </a:xfrm>
           <a:prstGeom prst="rect">
             <a:avLst/>
@@ -10665,7 +10665,7 @@
                 </a:solidFill>
                 <a:latin typeface="Microsoft YaHei"/>
               </a:rPr>
-              <a:t>高校 / 商科</a:t>
+              <a:t>项目主导 + CSN 架构</a:t>
             </a:r>
           </a:p>
         </p:txBody>
@@ -10722,23 +10722,23 @@
         </p:nvSpPr>
         <p:spPr>
           <a:xfrm>
-            <a:off x="2697479" y="2011680"/>
-            <a:ext cx="2194560" cy="731520"/>
-          </a:xfrm>
-          <a:prstGeom prst="rect">
-            <a:avLst/>
-          </a:prstGeom>
-          <a:noFill/>
-        </p:spPr>
-        <p:txBody>
-          <a:bodyPr wrap="square" lIns="45720" rIns="45720" tIns="18288" bIns="18288">
-            <a:spAutoFit/>
-          </a:bodyPr>
-          <a:lstStyle/>
-          <a:p>
-            <a:pPr algn="ctr"/>
-            <a:r>
-              <a:rPr sz="4200" b="0">
+            <a:off x="2697479" y="1920240"/>
+            <a:ext cx="2194560" cy="548640"/>
+          </a:xfrm>
+          <a:prstGeom prst="rect">
+            <a:avLst/>
+          </a:prstGeom>
+          <a:noFill/>
+        </p:spPr>
+        <p:txBody>
+          <a:bodyPr wrap="square" lIns="45720" rIns="45720" tIns="18288" bIns="18288">
+            <a:spAutoFit/>
+          </a:bodyPr>
+          <a:lstStyle/>
+          <a:p>
+            <a:pPr algn="ctr"/>
+            <a:r>
+              <a:rPr sz="3600" b="0">
                 <a:solidFill>
                   <a:srgbClr val="10B981"/>
                 </a:solidFill>
@@ -10757,7 +10757,7 @@
         </p:nvSpPr>
         <p:spPr>
           <a:xfrm>
-            <a:off x="2697479" y="2743200"/>
+            <a:off x="2697479" y="2514600"/>
             <a:ext cx="2194560" cy="365760"/>
           </a:xfrm>
           <a:prstGeom prst="rect">
@@ -10773,13 +10773,13 @@
           <a:p>
             <a:pPr algn="ctr"/>
             <a:r>
-              <a:rPr sz="1400" b="1">
+              <a:rPr sz="1800" b="1">
                 <a:solidFill>
                   <a:srgbClr val="10B981"/>
                 </a:solidFill>
                 <a:latin typeface="Microsoft YaHei"/>
               </a:rPr>
-              <a:t>技术负责人</a:t>
+              <a:t>汪枳航</a:t>
             </a:r>
           </a:p>
         </p:txBody>
@@ -10792,7 +10792,7 @@
         </p:nvSpPr>
         <p:spPr>
           <a:xfrm>
-            <a:off x="3063239" y="3200400"/>
+            <a:off x="3063239" y="2926080"/>
             <a:ext cx="1463040" cy="18288"/>
           </a:xfrm>
           <a:prstGeom prst="rect">
@@ -10835,8 +10835,8 @@
         </p:nvSpPr>
         <p:spPr>
           <a:xfrm>
-            <a:off x="2788919" y="3291840"/>
-            <a:ext cx="2011680" cy="365760"/>
+            <a:off x="2788919" y="3017520"/>
+            <a:ext cx="2011680" cy="457200"/>
           </a:xfrm>
           <a:prstGeom prst="rect">
             <a:avLst/>
@@ -10857,7 +10857,7 @@
                 </a:solidFill>
                 <a:latin typeface="Microsoft YaHei"/>
               </a:rPr>
-              <a:t>核心架构</a:t>
+              <a:t>核心技术 / 算法实现</a:t>
             </a:r>
           </a:p>
         </p:txBody>
@@ -10870,8 +10870,8 @@
         </p:nvSpPr>
         <p:spPr>
           <a:xfrm>
-            <a:off x="2788919" y="3657600"/>
-            <a:ext cx="2011680" cy="365760"/>
+            <a:off x="2788919" y="3520440"/>
+            <a:ext cx="2011680" cy="457200"/>
           </a:xfrm>
           <a:prstGeom prst="rect">
             <a:avLst/>
@@ -10892,7 +10892,7 @@
                 </a:solidFill>
                 <a:latin typeface="Microsoft YaHei"/>
               </a:rPr>
-              <a:t>高校 / CS</a:t>
+              <a:t>BKT/DKT/IRT + 知识图谱</a:t>
             </a:r>
           </a:p>
         </p:txBody>
@@ -10949,29 +10949,29 @@
         </p:nvSpPr>
         <p:spPr>
           <a:xfrm>
-            <a:off x="5029200" y="2011680"/>
-            <a:ext cx="2194560" cy="731520"/>
-          </a:xfrm>
-          <a:prstGeom prst="rect">
-            <a:avLst/>
-          </a:prstGeom>
-          <a:noFill/>
-        </p:spPr>
-        <p:txBody>
-          <a:bodyPr wrap="square" lIns="45720" rIns="45720" tIns="18288" bIns="18288">
-            <a:spAutoFit/>
-          </a:bodyPr>
-          <a:lstStyle/>
-          <a:p>
-            <a:pPr algn="ctr"/>
-            <a:r>
-              <a:rPr sz="4200" b="0">
+            <a:off x="5029200" y="1920240"/>
+            <a:ext cx="2194560" cy="548640"/>
+          </a:xfrm>
+          <a:prstGeom prst="rect">
+            <a:avLst/>
+          </a:prstGeom>
+          <a:noFill/>
+        </p:spPr>
+        <p:txBody>
+          <a:bodyPr wrap="square" lIns="45720" rIns="45720" tIns="18288" bIns="18288">
+            <a:spAutoFit/>
+          </a:bodyPr>
+          <a:lstStyle/>
+          <a:p>
+            <a:pPr algn="ctr"/>
+            <a:r>
+              <a:rPr sz="3600" b="0">
                 <a:solidFill>
                   <a:srgbClr val="F59E0B"/>
                 </a:solidFill>
                 <a:latin typeface="Microsoft YaHei"/>
               </a:rPr>
-              <a:t>🧠</a:t>
+              <a:t>📚</a:t>
             </a:r>
           </a:p>
         </p:txBody>
@@ -10984,7 +10984,7 @@
         </p:nvSpPr>
         <p:spPr>
           <a:xfrm>
-            <a:off x="5029200" y="2743200"/>
+            <a:off x="5029200" y="2514600"/>
             <a:ext cx="2194560" cy="365760"/>
           </a:xfrm>
           <a:prstGeom prst="rect">
@@ -11000,13 +11000,13 @@
           <a:p>
             <a:pPr algn="ctr"/>
             <a:r>
-              <a:rPr sz="1400" b="1">
+              <a:rPr sz="1800" b="1">
                 <a:solidFill>
                   <a:srgbClr val="F59E0B"/>
                 </a:solidFill>
                 <a:latin typeface="Microsoft YaHei"/>
               </a:rPr>
-              <a:t>AI 算法负责人</a:t>
+              <a:t>谷昊洋</a:t>
             </a:r>
           </a:p>
         </p:txBody>
@@ -11019,7 +11019,7 @@
         </p:nvSpPr>
         <p:spPr>
           <a:xfrm>
-            <a:off x="5394960" y="3200400"/>
+            <a:off x="5394960" y="2926080"/>
             <a:ext cx="1463040" cy="18288"/>
           </a:xfrm>
           <a:prstGeom prst="rect">
@@ -11062,8 +11062,8 @@
         </p:nvSpPr>
         <p:spPr>
           <a:xfrm>
-            <a:off x="5120640" y="3291840"/>
-            <a:ext cx="2011680" cy="365760"/>
+            <a:off x="5120640" y="3017520"/>
+            <a:ext cx="2011680" cy="457200"/>
           </a:xfrm>
           <a:prstGeom prst="rect">
             <a:avLst/>
@@ -11084,7 +11084,7 @@
                 </a:solidFill>
                 <a:latin typeface="Microsoft YaHei"/>
               </a:rPr>
-              <a:t>认知诊断 + RL</a:t>
+              <a:t>教育理论 / 教学设计</a:t>
             </a:r>
           </a:p>
         </p:txBody>
@@ -11097,8 +11097,8 @@
         </p:nvSpPr>
         <p:spPr>
           <a:xfrm>
-            <a:off x="5120640" y="3657600"/>
-            <a:ext cx="2011680" cy="365760"/>
+            <a:off x="5120640" y="3520440"/>
+            <a:ext cx="2011680" cy="457200"/>
           </a:xfrm>
           <a:prstGeom prst="rect">
             <a:avLst/>
@@ -11119,7 +11119,7 @@
                 </a:solidFill>
                 <a:latin typeface="Microsoft YaHei"/>
               </a:rPr>
-              <a:t>高校 / AI</a:t>
+              <a:t>ZPD + Bloom + 脚手架</a:t>
             </a:r>
           </a:p>
         </p:txBody>
@@ -11176,29 +11176,29 @@
         </p:nvSpPr>
         <p:spPr>
           <a:xfrm>
-            <a:off x="7360919" y="2011680"/>
-            <a:ext cx="2194560" cy="731520"/>
-          </a:xfrm>
-          <a:prstGeom prst="rect">
-            <a:avLst/>
-          </a:prstGeom>
-          <a:noFill/>
-        </p:spPr>
-        <p:txBody>
-          <a:bodyPr wrap="square" lIns="45720" rIns="45720" tIns="18288" bIns="18288">
-            <a:spAutoFit/>
-          </a:bodyPr>
-          <a:lstStyle/>
-          <a:p>
-            <a:pPr algn="ctr"/>
-            <a:r>
-              <a:rPr sz="4200" b="0">
+            <a:off x="7360919" y="1920240"/>
+            <a:ext cx="2194560" cy="548640"/>
+          </a:xfrm>
+          <a:prstGeom prst="rect">
+            <a:avLst/>
+          </a:prstGeom>
+          <a:noFill/>
+        </p:spPr>
+        <p:txBody>
+          <a:bodyPr wrap="square" lIns="45720" rIns="45720" tIns="18288" bIns="18288">
+            <a:spAutoFit/>
+          </a:bodyPr>
+          <a:lstStyle/>
+          <a:p>
+            <a:pPr algn="ctr"/>
+            <a:r>
+              <a:rPr sz="3600" b="0">
                 <a:solidFill>
                   <a:srgbClr val="8B5CF6"/>
                 </a:solidFill>
                 <a:latin typeface="Microsoft YaHei"/>
               </a:rPr>
-              <a:t>📚</a:t>
+              <a:t>🛠️</a:t>
             </a:r>
           </a:p>
         </p:txBody>
@@ -11211,7 +11211,7 @@
         </p:nvSpPr>
         <p:spPr>
           <a:xfrm>
-            <a:off x="7360919" y="2743200"/>
+            <a:off x="7360919" y="2514600"/>
             <a:ext cx="2194560" cy="365760"/>
           </a:xfrm>
           <a:prstGeom prst="rect">
@@ -11227,13 +11227,13 @@
           <a:p>
             <a:pPr algn="ctr"/>
             <a:r>
-              <a:rPr sz="1400" b="1">
+              <a:rPr sz="1800" b="1">
                 <a:solidFill>
                   <a:srgbClr val="8B5CF6"/>
                 </a:solidFill>
                 <a:latin typeface="Microsoft YaHei"/>
               </a:rPr>
-              <a:t>教育学顾问</a:t>
+              <a:t>王一维</a:t>
             </a:r>
           </a:p>
         </p:txBody>
@@ -11246,7 +11246,7 @@
         </p:nvSpPr>
         <p:spPr>
           <a:xfrm>
-            <a:off x="7726679" y="3200400"/>
+            <a:off x="7726679" y="2926080"/>
             <a:ext cx="1463040" cy="18288"/>
           </a:xfrm>
           <a:prstGeom prst="rect">
@@ -11289,8 +11289,8 @@
         </p:nvSpPr>
         <p:spPr>
           <a:xfrm>
-            <a:off x="7452359" y="3291840"/>
-            <a:ext cx="2011680" cy="365760"/>
+            <a:off x="7452359" y="3017520"/>
+            <a:ext cx="2011680" cy="457200"/>
           </a:xfrm>
           <a:prstGeom prst="rect">
             <a:avLst/>
@@ -11311,7 +11311,7 @@
                 </a:solidFill>
                 <a:latin typeface="Microsoft YaHei"/>
               </a:rPr>
-              <a:t>认知科学理论</a:t>
+              <a:t>工程实现 / 测试</a:t>
             </a:r>
           </a:p>
         </p:txBody>
@@ -11324,8 +11324,8 @@
         </p:nvSpPr>
         <p:spPr>
           <a:xfrm>
-            <a:off x="7452359" y="3657600"/>
-            <a:ext cx="2011680" cy="365760"/>
+            <a:off x="7452359" y="3520440"/>
+            <a:ext cx="2011680" cy="457200"/>
           </a:xfrm>
           <a:prstGeom prst="rect">
             <a:avLst/>
@@ -11346,7 +11346,7 @@
                 </a:solidFill>
                 <a:latin typeface="Microsoft YaHei"/>
               </a:rPr>
-              <a:t>高校 / 教育</a:t>
+              <a:t>Web Demo + 单元测试</a:t>
             </a:r>
           </a:p>
         </p:txBody>
@@ -11403,29 +11403,29 @@
         </p:nvSpPr>
         <p:spPr>
           <a:xfrm>
-            <a:off x="9692640" y="2011680"/>
-            <a:ext cx="2194560" cy="731520"/>
-          </a:xfrm>
-          <a:prstGeom prst="rect">
-            <a:avLst/>
-          </a:prstGeom>
-          <a:noFill/>
-        </p:spPr>
-        <p:txBody>
-          <a:bodyPr wrap="square" lIns="45720" rIns="45720" tIns="18288" bIns="18288">
-            <a:spAutoFit/>
-          </a:bodyPr>
-          <a:lstStyle/>
-          <a:p>
-            <a:pPr algn="ctr"/>
-            <a:r>
-              <a:rPr sz="4200" b="0">
+            <a:off x="9692640" y="1920240"/>
+            <a:ext cx="2194560" cy="548640"/>
+          </a:xfrm>
+          <a:prstGeom prst="rect">
+            <a:avLst/>
+          </a:prstGeom>
+          <a:noFill/>
+        </p:spPr>
+        <p:txBody>
+          <a:bodyPr wrap="square" lIns="45720" rIns="45720" tIns="18288" bIns="18288">
+            <a:spAutoFit/>
+          </a:bodyPr>
+          <a:lstStyle/>
+          <a:p>
+            <a:pPr algn="ctr"/>
+            <a:r>
+              <a:rPr sz="3600" b="0">
                 <a:solidFill>
                   <a:srgbClr val="EF4444"/>
                 </a:solidFill>
                 <a:latin typeface="Microsoft YaHei"/>
               </a:rPr>
-              <a:t>🎨</a:t>
+              <a:t>📊</a:t>
             </a:r>
           </a:p>
         </p:txBody>
@@ -11438,7 +11438,7 @@
         </p:nvSpPr>
         <p:spPr>
           <a:xfrm>
-            <a:off x="9692640" y="2743200"/>
+            <a:off x="9692640" y="2514600"/>
             <a:ext cx="2194560" cy="365760"/>
           </a:xfrm>
           <a:prstGeom prst="rect">
@@ -11454,13 +11454,13 @@
           <a:p>
             <a:pPr algn="ctr"/>
             <a:r>
-              <a:rPr sz="1400" b="1">
+              <a:rPr sz="1800" b="1">
                 <a:solidFill>
                   <a:srgbClr val="EF4444"/>
                 </a:solidFill>
                 <a:latin typeface="Microsoft YaHei"/>
               </a:rPr>
-              <a:t>产品负责人</a:t>
+              <a:t>孙布赫</a:t>
             </a:r>
           </a:p>
         </p:txBody>
@@ -11473,7 +11473,7 @@
         </p:nvSpPr>
         <p:spPr>
           <a:xfrm>
-            <a:off x="10058400" y="3200400"/>
+            <a:off x="10058400" y="2926080"/>
             <a:ext cx="1463040" cy="18288"/>
           </a:xfrm>
           <a:prstGeom prst="rect">
@@ -11516,8 +11516,8 @@
         </p:nvSpPr>
         <p:spPr>
           <a:xfrm>
-            <a:off x="9784080" y="3291840"/>
-            <a:ext cx="2011680" cy="365760"/>
+            <a:off x="9784080" y="3017520"/>
+            <a:ext cx="2011680" cy="457200"/>
           </a:xfrm>
           <a:prstGeom prst="rect">
             <a:avLst/>
@@ -11538,7 +11538,7 @@
                 </a:solidFill>
                 <a:latin typeface="Microsoft YaHei"/>
               </a:rPr>
-              <a:t>用户体验</a:t>
+              <a:t>商业模式 / 文档</a:t>
             </a:r>
           </a:p>
         </p:txBody>
@@ -11551,8 +11551,8 @@
         </p:nvSpPr>
         <p:spPr>
           <a:xfrm>
-            <a:off x="9784080" y="3657600"/>
-            <a:ext cx="2011680" cy="365760"/>
+            <a:off x="9784080" y="3520440"/>
+            <a:ext cx="2011680" cy="457200"/>
           </a:xfrm>
           <a:prstGeom prst="rect">
             <a:avLst/>
@@ -11573,7 +11573,7 @@
                 </a:solidFill>
                 <a:latin typeface="Microsoft YaHei"/>
               </a:rPr>
-              <a:t>高校 / 设计</a:t>
+              <a:t>TAM/SAM/SOM + 计划书</a:t>
             </a:r>
           </a:p>
         </p:txBody>
